--- a/presentations/Изотов_ВКР_нейросетевая-модель_LSTM.pptx
+++ b/presentations/Изотов_ВКР_нейросетевая-модель_LSTM.pptx
@@ -9933,12 +9933,12 @@
         </p:nvSpPr>
         <p:spPr>
           <a:xfrm>
-            <a:off x="700000" y="1820000"/>
-            <a:ext cx="6280000" cy="3120000"/>
+            <a:off x="760000" y="1860000"/>
+            <a:ext cx="10670000" cy="3120000"/>
           </a:xfrm>
           <a:prstGeom prst="roundRect">
             <a:avLst>
-              <a:gd name="adj" fmla="val 4000"/>
+              <a:gd name="adj" fmla="val 3500"/>
             </a:avLst>
           </a:prstGeom>
           <a:solidFill>
@@ -9966,8 +9966,8 @@
         </p:nvCxnSpPr>
         <p:spPr>
           <a:xfrm>
-            <a:off x="850000" y="2330000"/>
-            <a:ext cx="5980000" cy="0"/>
+            <a:off x="930000" y="2380000"/>
+            <a:ext cx="10330000" cy="0"/>
           </a:xfrm>
           <a:prstGeom prst="straightConnector1">
             <a:avLst/>
@@ -9987,8 +9987,8 @@
         </p:nvSpPr>
         <p:spPr>
           <a:xfrm>
-            <a:off x="820000" y="1970000"/>
-            <a:ext cx="1400000" cy="260000"/>
+            <a:off x="960000" y="2010000"/>
+            <a:ext cx="5200000" cy="300000"/>
           </a:xfrm>
           <a:prstGeom prst="rect">
             <a:avLst/>
@@ -10004,7 +10004,7 @@
               <a:buNone/>
             </a:pPr>
             <a:r>
-              <a:rPr lang="ru-RU" sz="1000" b="1" kern="0" dirty="0">
+              <a:rPr lang="ru-RU" sz="1050" b="1" kern="0" dirty="0">
                 <a:solidFill>
                   <a:srgbClr val="4A5560"/>
                 </a:solidFill>
@@ -10012,32 +10012,49 @@
                 <a:ea typeface="Calibri" pitchFamily="34" charset="-122"/>
                 <a:cs typeface="Calibri" pitchFamily="34" charset="-120"/>
               </a:rPr>
-              <a:t>состояние Cₜ</a:t>
-            </a:r>
-          </a:p>
-        </p:txBody>
-      </p:sp>
-      <p:cxnSp>
-        <p:nvCxnSpPr>
-          <p:cNvPr id="107" name="c"/>
-          <p:cNvCxnSpPr/>
-          <p:nvPr/>
-        </p:nvCxnSpPr>
-        <p:spPr>
-          <a:xfrm flipV="1">
-            <a:off x="2050000" y="2480000"/>
-            <a:ext cx="0" cy="1210000"/>
-          </a:xfrm>
-          <a:prstGeom prst="straightConnector1">
-            <a:avLst/>
-          </a:prstGeom>
-          <a:ln w="15875" cap="rnd">
-            <a:solidFill>
-              <a:srgbClr val="E8C24A"/>
-            </a:solidFill>
-          </a:ln>
-        </p:spPr>
-      </p:cxnSp>
+              <a:t>Память ячейки Cₜ — контекст всей сессии</a:t>
+            </a:r>
+          </a:p>
+        </p:txBody>
+      </p:sp>
+      <p:sp>
+        <p:nvSpPr>
+          <p:cNvPr id="107" name="T"/>
+          <p:cNvSpPr/>
+          <p:nvPr/>
+        </p:nvSpPr>
+        <p:spPr>
+          <a:xfrm>
+            <a:off x="10130000" y="2010000"/>
+            <a:ext cx="1100000" cy="300000"/>
+          </a:xfrm>
+          <a:prstGeom prst="rect">
+            <a:avLst/>
+          </a:prstGeom>
+          <a:noFill/>
+          <a:ln/>
+        </p:spPr>
+        <p:txBody>
+          <a:bodyPr wrap="square" lIns="0" tIns="0" rIns="0" bIns="0" rtlCol="0" anchor="ctr"/>
+          <a:lstStyle/>
+          <a:p>
+            <a:pPr algn="r" indent="0" marL="0">
+              <a:buNone/>
+            </a:pPr>
+            <a:r>
+              <a:rPr lang="ru-RU" sz="1050" b="1" kern="0" dirty="0">
+                <a:solidFill>
+                  <a:srgbClr val="4A5560"/>
+                </a:solidFill>
+                <a:latin typeface="Calibri" pitchFamily="34" charset="0"/>
+                <a:ea typeface="Calibri" pitchFamily="34" charset="-122"/>
+                <a:cs typeface="Calibri" pitchFamily="34" charset="-120"/>
+              </a:rPr>
+              <a:t>Cₜ</a:t>
+            </a:r>
+          </a:p>
+        </p:txBody>
+      </p:sp>
       <p:cxnSp>
         <p:nvCxnSpPr>
           <p:cNvPr id="108" name="c"/>
@@ -10046,13 +10063,13 @@
         </p:nvCxnSpPr>
         <p:spPr>
           <a:xfrm flipV="1">
-            <a:off x="3330000" y="3190000"/>
-            <a:ext cx="320000" cy="500000"/>
+            <a:off x="2500000" y="2530000"/>
+            <a:ext cx="0" cy="1200000"/>
           </a:xfrm>
           <a:prstGeom prst="straightConnector1">
             <a:avLst/>
           </a:prstGeom>
-          <a:ln w="15875" cap="rnd">
+          <a:ln w="19050" cap="rnd">
             <a:solidFill>
               <a:srgbClr val="E8C24A"/>
             </a:solidFill>
@@ -10066,14 +10083,14 @@
           <p:nvPr/>
         </p:nvCxnSpPr>
         <p:spPr>
-          <a:xfrm flipH="1" flipV="1">
-            <a:off x="3650000" y="3190000"/>
-            <a:ext cx="320000" cy="500000"/>
+          <a:xfrm flipV="1">
+            <a:off x="4300000" y="3300000"/>
+            <a:ext cx="500000" cy="430000"/>
           </a:xfrm>
           <a:prstGeom prst="straightConnector1">
             <a:avLst/>
           </a:prstGeom>
-          <a:ln w="15875" cap="rnd">
+          <a:ln w="19050" cap="rnd">
             <a:solidFill>
               <a:srgbClr val="E8C24A"/>
             </a:solidFill>
@@ -10087,16 +10104,16 @@
           <p:nvPr/>
         </p:nvCxnSpPr>
         <p:spPr>
-          <a:xfrm flipV="1">
-            <a:off x="3650000" y="2480000"/>
-            <a:ext cx="0" cy="410000"/>
+          <a:xfrm flipH="1" flipV="1">
+            <a:off x="4800000" y="3300000"/>
+            <a:ext cx="500000" cy="430000"/>
           </a:xfrm>
           <a:prstGeom prst="straightConnector1">
             <a:avLst/>
           </a:prstGeom>
-          <a:ln w="15875" cap="rnd">
+          <a:ln w="19050" cap="rnd">
             <a:solidFill>
-              <a:srgbClr val="E59BB0"/>
+              <a:srgbClr val="E8C24A"/>
             </a:solidFill>
           </a:ln>
         </p:spPr>
@@ -10109,15 +10126,15 @@
         </p:nvCxnSpPr>
         <p:spPr>
           <a:xfrm flipV="1">
-            <a:off x="5650000" y="3190000"/>
-            <a:ext cx="0" cy="500000"/>
+            <a:off x="4800000" y="2530000"/>
+            <a:ext cx="0" cy="470000"/>
           </a:xfrm>
           <a:prstGeom prst="straightConnector1">
             <a:avLst/>
           </a:prstGeom>
-          <a:ln w="15875" cap="rnd">
+          <a:ln w="19050" cap="rnd">
             <a:solidFill>
-              <a:srgbClr val="E8C24A"/>
+              <a:srgbClr val="E59BB0"/>
             </a:solidFill>
           </a:ln>
         </p:spPr>
@@ -10129,16 +10146,16 @@
           <p:nvPr/>
         </p:nvCxnSpPr>
         <p:spPr>
-          <a:xfrm>
-            <a:off x="5650000" y="2480000"/>
-            <a:ext cx="0" cy="410000"/>
+          <a:xfrm flipV="1">
+            <a:off x="8500000" y="3300000"/>
+            <a:ext cx="0" cy="430000"/>
           </a:xfrm>
           <a:prstGeom prst="straightConnector1">
             <a:avLst/>
           </a:prstGeom>
-          <a:ln w="15875" cap="rnd">
+          <a:ln w="19050" cap="rnd">
             <a:solidFill>
-              <a:srgbClr val="4A5560"/>
+              <a:srgbClr val="E8C24A"/>
             </a:solidFill>
           </a:ln>
         </p:spPr>
@@ -10151,13 +10168,13 @@
         </p:nvCxnSpPr>
         <p:spPr>
           <a:xfrm>
-            <a:off x="5650000" y="3040000"/>
-            <a:ext cx="1000000" cy="0"/>
+            <a:off x="8500000" y="2530000"/>
+            <a:ext cx="0" cy="470000"/>
           </a:xfrm>
           <a:prstGeom prst="straightConnector1">
             <a:avLst/>
           </a:prstGeom>
-          <a:ln w="18000" cap="rnd">
+          <a:ln w="19050" cap="rnd">
             <a:solidFill>
               <a:srgbClr val="4A5560"/>
             </a:solidFill>
@@ -10171,14 +10188,35 @@
           <p:nvPr/>
         </p:nvCxnSpPr>
         <p:spPr>
+          <a:xfrm>
+            <a:off x="8500000" y="3150000"/>
+            <a:ext cx="1100000" cy="0"/>
+          </a:xfrm>
+          <a:prstGeom prst="straightConnector1">
+            <a:avLst/>
+          </a:prstGeom>
+          <a:ln w="19050" cap="rnd">
+            <a:solidFill>
+              <a:srgbClr val="4A5560"/>
+            </a:solidFill>
+          </a:ln>
+        </p:spPr>
+      </p:cxnSp>
+      <p:cxnSp>
+        <p:nvCxnSpPr>
+          <p:cNvPr id="115" name="c"/>
+          <p:cNvCxnSpPr/>
+          <p:nvPr/>
+        </p:nvCxnSpPr>
+        <p:spPr>
           <a:xfrm flipV="1">
-            <a:off x="6650000" y="1560000"/>
-            <a:ext cx="0" cy="1480000"/>
+            <a:off x="9600000" y="1540000"/>
+            <a:ext cx="0" cy="1610000"/>
           </a:xfrm>
           <a:prstGeom prst="straightConnector1">
             <a:avLst/>
           </a:prstGeom>
-          <a:ln w="18000" cap="rnd">
+          <a:ln w="19050" cap="rnd">
             <a:solidFill>
               <a:srgbClr val="4A5560"/>
             </a:solidFill>
@@ -10188,14 +10226,14 @@
       </p:cxnSp>
       <p:cxnSp>
         <p:nvCxnSpPr>
-          <p:cNvPr id="115" name="c"/>
+          <p:cNvPr id="116" name="c"/>
           <p:cNvCxnSpPr/>
           <p:nvPr/>
         </p:nvCxnSpPr>
         <p:spPr>
           <a:xfrm>
-            <a:off x="900000" y="4560000"/>
-            <a:ext cx="5200000" cy="0"/>
+            <a:off x="1140000" y="4640000"/>
+            <a:ext cx="7760000" cy="0"/>
           </a:xfrm>
           <a:prstGeom prst="straightConnector1">
             <a:avLst/>
@@ -10209,14 +10247,14 @@
       </p:cxnSp>
       <p:cxnSp>
         <p:nvCxnSpPr>
-          <p:cNvPr id="116" name="c"/>
+          <p:cNvPr id="117" name="c"/>
           <p:cNvCxnSpPr/>
           <p:nvPr/>
         </p:nvCxnSpPr>
         <p:spPr>
           <a:xfrm flipV="1">
-            <a:off x="2050000" y="4070000"/>
-            <a:ext cx="0" cy="490000"/>
+            <a:off x="2500000" y="4110000"/>
+            <a:ext cx="0" cy="530000"/>
           </a:xfrm>
           <a:prstGeom prst="straightConnector1">
             <a:avLst/>
@@ -10230,14 +10268,14 @@
       </p:cxnSp>
       <p:cxnSp>
         <p:nvCxnSpPr>
-          <p:cNvPr id="117" name="c"/>
+          <p:cNvPr id="118" name="c"/>
           <p:cNvCxnSpPr/>
           <p:nvPr/>
         </p:nvCxnSpPr>
         <p:spPr>
           <a:xfrm flipV="1">
-            <a:off x="3330000" y="4070000"/>
-            <a:ext cx="0" cy="490000"/>
+            <a:off x="4300000" y="4110000"/>
+            <a:ext cx="0" cy="530000"/>
           </a:xfrm>
           <a:prstGeom prst="straightConnector1">
             <a:avLst/>
@@ -10251,14 +10289,14 @@
       </p:cxnSp>
       <p:cxnSp>
         <p:nvCxnSpPr>
-          <p:cNvPr id="118" name="c"/>
+          <p:cNvPr id="119" name="c"/>
           <p:cNvCxnSpPr/>
           <p:nvPr/>
         </p:nvCxnSpPr>
         <p:spPr>
           <a:xfrm flipV="1">
-            <a:off x="3970000" y="4070000"/>
-            <a:ext cx="0" cy="490000"/>
+            <a:off x="5300000" y="4110000"/>
+            <a:ext cx="0" cy="530000"/>
           </a:xfrm>
           <a:prstGeom prst="straightConnector1">
             <a:avLst/>
@@ -10272,14 +10310,14 @@
       </p:cxnSp>
       <p:cxnSp>
         <p:nvCxnSpPr>
-          <p:cNvPr id="119" name="c"/>
+          <p:cNvPr id="120" name="c"/>
           <p:cNvCxnSpPr/>
           <p:nvPr/>
         </p:nvCxnSpPr>
         <p:spPr>
           <a:xfrm flipV="1">
-            <a:off x="5650000" y="4070000"/>
-            <a:ext cx="0" cy="490000"/>
+            <a:off x="8500000" y="4110000"/>
+            <a:ext cx="0" cy="530000"/>
           </a:xfrm>
           <a:prstGeom prst="straightConnector1">
             <a:avLst/>
@@ -10293,13 +10331,13 @@
       </p:cxnSp>
       <p:sp>
         <p:nvSpPr>
-          <p:cNvPr id="120" name="T"/>
-          <p:cNvSpPr/>
-          <p:nvPr/>
-        </p:nvSpPr>
-        <p:spPr>
-          <a:xfrm>
-            <a:off x="640080" y="4520000"/>
+          <p:cNvPr id="121" name="T"/>
+          <p:cNvSpPr/>
+          <p:nvPr/>
+        </p:nvSpPr>
+        <p:spPr>
+          <a:xfrm>
+            <a:off x="800000" y="4610000"/>
             <a:ext cx="1300000" cy="300000"/>
           </a:xfrm>
           <a:prstGeom prst="rect">
@@ -10316,7 +10354,7 @@
               <a:buNone/>
             </a:pPr>
             <a:r>
-              <a:rPr lang="ru-RU" sz="1100" b="1" kern="0" dirty="0">
+              <a:rPr lang="ru-RU" sz="1050" b="1" kern="0" dirty="0">
                 <a:solidFill>
                   <a:srgbClr val="33383F"/>
                 </a:solidFill>
@@ -10324,20 +10362,20 @@
                 <a:ea typeface="Calibri" pitchFamily="34" charset="-122"/>
                 <a:cs typeface="Calibri" pitchFamily="34" charset="-120"/>
               </a:rPr>
-              <a:t>hₜ₋₁, xₜ</a:t>
-            </a:r>
-          </a:p>
-        </p:txBody>
-      </p:sp>
-      <p:sp>
-        <p:nvSpPr>
-          <p:cNvPr id="121" name="S"/>
-          <p:cNvSpPr/>
-          <p:nvPr/>
-        </p:nvSpPr>
-        <p:spPr>
-          <a:xfrm>
-            <a:off x="1900000" y="2180000"/>
+              <a:t>вход: hₜ₋₁, xₜ</a:t>
+            </a:r>
+          </a:p>
+        </p:txBody>
+      </p:sp>
+      <p:sp>
+        <p:nvSpPr>
+          <p:cNvPr id="122" name="S"/>
+          <p:cNvSpPr/>
+          <p:nvPr/>
+        </p:nvSpPr>
+        <p:spPr>
+          <a:xfrm>
+            <a:off x="2350000" y="2230000"/>
             <a:ext cx="300000" cy="300000"/>
           </a:xfrm>
           <a:prstGeom prst="ellipse">
@@ -10355,13 +10393,13 @@
       </p:sp>
       <p:sp>
         <p:nvSpPr>
-          <p:cNvPr id="122" name="T"/>
-          <p:cNvSpPr/>
-          <p:nvPr/>
-        </p:nvSpPr>
-        <p:spPr>
-          <a:xfrm>
-            <a:off x="1900000" y="2180000"/>
+          <p:cNvPr id="123" name="T"/>
+          <p:cNvSpPr/>
+          <p:nvPr/>
+        </p:nvSpPr>
+        <p:spPr>
+          <a:xfrm>
+            <a:off x="2350000" y="2230000"/>
             <a:ext cx="300000" cy="300000"/>
           </a:xfrm>
           <a:prstGeom prst="rect">
@@ -10393,13 +10431,13 @@
       </p:sp>
       <p:sp>
         <p:nvSpPr>
-          <p:cNvPr id="123" name="S"/>
-          <p:cNvSpPr/>
-          <p:nvPr/>
-        </p:nvSpPr>
-        <p:spPr>
-          <a:xfrm>
-            <a:off x="3500000" y="2180000"/>
+          <p:cNvPr id="124" name="S"/>
+          <p:cNvSpPr/>
+          <p:nvPr/>
+        </p:nvSpPr>
+        <p:spPr>
+          <a:xfrm>
+            <a:off x="4650000" y="2230000"/>
             <a:ext cx="300000" cy="300000"/>
           </a:xfrm>
           <a:prstGeom prst="ellipse">
@@ -10417,13 +10455,13 @@
       </p:sp>
       <p:sp>
         <p:nvSpPr>
-          <p:cNvPr id="124" name="T"/>
-          <p:cNvSpPr/>
-          <p:nvPr/>
-        </p:nvSpPr>
-        <p:spPr>
-          <a:xfrm>
-            <a:off x="3500000" y="2180000"/>
+          <p:cNvPr id="125" name="T"/>
+          <p:cNvSpPr/>
+          <p:nvPr/>
+        </p:nvSpPr>
+        <p:spPr>
+          <a:xfrm>
+            <a:off x="4650000" y="2230000"/>
             <a:ext cx="300000" cy="300000"/>
           </a:xfrm>
           <a:prstGeom prst="rect">
@@ -10455,13 +10493,13 @@
       </p:sp>
       <p:sp>
         <p:nvSpPr>
-          <p:cNvPr id="125" name="S"/>
-          <p:cNvSpPr/>
-          <p:nvPr/>
-        </p:nvSpPr>
-        <p:spPr>
-          <a:xfrm>
-            <a:off x="3500000" y="2890000"/>
+          <p:cNvPr id="126" name="S"/>
+          <p:cNvSpPr/>
+          <p:nvPr/>
+        </p:nvSpPr>
+        <p:spPr>
+          <a:xfrm>
+            <a:off x="4650000" y="3000000"/>
             <a:ext cx="300000" cy="300000"/>
           </a:xfrm>
           <a:prstGeom prst="ellipse">
@@ -10479,13 +10517,13 @@
       </p:sp>
       <p:sp>
         <p:nvSpPr>
-          <p:cNvPr id="126" name="T"/>
-          <p:cNvSpPr/>
-          <p:nvPr/>
-        </p:nvSpPr>
-        <p:spPr>
-          <a:xfrm>
-            <a:off x="3500000" y="2890000"/>
+          <p:cNvPr id="127" name="T"/>
+          <p:cNvSpPr/>
+          <p:nvPr/>
+        </p:nvSpPr>
+        <p:spPr>
+          <a:xfrm>
+            <a:off x="4650000" y="3000000"/>
             <a:ext cx="300000" cy="300000"/>
           </a:xfrm>
           <a:prstGeom prst="rect">
@@ -10517,13 +10555,13 @@
       </p:sp>
       <p:sp>
         <p:nvSpPr>
-          <p:cNvPr id="127" name="S"/>
-          <p:cNvSpPr/>
-          <p:nvPr/>
-        </p:nvSpPr>
-        <p:spPr>
-          <a:xfrm>
-            <a:off x="5500000" y="2890000"/>
+          <p:cNvPr id="128" name="S"/>
+          <p:cNvSpPr/>
+          <p:nvPr/>
+        </p:nvSpPr>
+        <p:spPr>
+          <a:xfrm>
+            <a:off x="8350000" y="3000000"/>
             <a:ext cx="300000" cy="300000"/>
           </a:xfrm>
           <a:prstGeom prst="ellipse">
@@ -10541,13 +10579,13 @@
       </p:sp>
       <p:sp>
         <p:nvSpPr>
-          <p:cNvPr id="128" name="T"/>
-          <p:cNvSpPr/>
-          <p:nvPr/>
-        </p:nvSpPr>
-        <p:spPr>
-          <a:xfrm>
-            <a:off x="5500000" y="2890000"/>
+          <p:cNvPr id="129" name="T"/>
+          <p:cNvSpPr/>
+          <p:nvPr/>
+        </p:nvSpPr>
+        <p:spPr>
+          <a:xfrm>
+            <a:off x="8350000" y="3000000"/>
             <a:ext cx="300000" cy="300000"/>
           </a:xfrm>
           <a:prstGeom prst="rect">
@@ -10579,13 +10617,13 @@
       </p:sp>
       <p:sp>
         <p:nvSpPr>
-          <p:cNvPr id="129" name="S"/>
-          <p:cNvSpPr/>
-          <p:nvPr/>
-        </p:nvSpPr>
-        <p:spPr>
-          <a:xfrm>
-            <a:off x="5370000" y="2170000"/>
+          <p:cNvPr id="130" name="S"/>
+          <p:cNvSpPr/>
+          <p:nvPr/>
+        </p:nvSpPr>
+        <p:spPr>
+          <a:xfrm>
+            <a:off x="8220000" y="2220000"/>
             <a:ext cx="560000" cy="320000"/>
           </a:xfrm>
           <a:prstGeom prst="ellipse">
@@ -10603,13 +10641,13 @@
       </p:sp>
       <p:sp>
         <p:nvSpPr>
-          <p:cNvPr id="130" name="T"/>
-          <p:cNvSpPr/>
-          <p:nvPr/>
-        </p:nvSpPr>
-        <p:spPr>
-          <a:xfrm>
-            <a:off x="5370000" y="2170000"/>
+          <p:cNvPr id="131" name="T"/>
+          <p:cNvSpPr/>
+          <p:nvPr/>
+        </p:nvSpPr>
+        <p:spPr>
+          <a:xfrm>
+            <a:off x="8220000" y="2220000"/>
             <a:ext cx="560000" cy="320000"/>
           </a:xfrm>
           <a:prstGeom prst="rect">
@@ -10641,13 +10679,13 @@
       </p:sp>
       <p:sp>
         <p:nvSpPr>
-          <p:cNvPr id="131" name="S"/>
-          <p:cNvSpPr/>
-          <p:nvPr/>
-        </p:nvSpPr>
-        <p:spPr>
-          <a:xfrm>
-            <a:off x="1770000" y="3690000"/>
+          <p:cNvPr id="132" name="S"/>
+          <p:cNvSpPr/>
+          <p:nvPr/>
+        </p:nvSpPr>
+        <p:spPr>
+          <a:xfrm>
+            <a:off x="2220000" y="3730000"/>
             <a:ext cx="560000" cy="380000"/>
           </a:xfrm>
           <a:prstGeom prst="roundRect">
@@ -10667,13 +10705,13 @@
       </p:sp>
       <p:sp>
         <p:nvSpPr>
-          <p:cNvPr id="132" name="T"/>
-          <p:cNvSpPr/>
-          <p:nvPr/>
-        </p:nvSpPr>
-        <p:spPr>
-          <a:xfrm>
-            <a:off x="1770000" y="3690000"/>
+          <p:cNvPr id="133" name="T"/>
+          <p:cNvSpPr/>
+          <p:nvPr/>
+        </p:nvSpPr>
+        <p:spPr>
+          <a:xfrm>
+            <a:off x="2220000" y="3730000"/>
             <a:ext cx="560000" cy="380000"/>
           </a:xfrm>
           <a:prstGeom prst="rect">
@@ -10705,13 +10743,13 @@
       </p:sp>
       <p:sp>
         <p:nvSpPr>
-          <p:cNvPr id="133" name="S"/>
-          <p:cNvSpPr/>
-          <p:nvPr/>
-        </p:nvSpPr>
-        <p:spPr>
-          <a:xfrm>
-            <a:off x="3050000" y="3690000"/>
+          <p:cNvPr id="134" name="S"/>
+          <p:cNvSpPr/>
+          <p:nvPr/>
+        </p:nvSpPr>
+        <p:spPr>
+          <a:xfrm>
+            <a:off x="4020000" y="3730000"/>
             <a:ext cx="560000" cy="380000"/>
           </a:xfrm>
           <a:prstGeom prst="roundRect">
@@ -10731,13 +10769,13 @@
       </p:sp>
       <p:sp>
         <p:nvSpPr>
-          <p:cNvPr id="134" name="T"/>
-          <p:cNvSpPr/>
-          <p:nvPr/>
-        </p:nvSpPr>
-        <p:spPr>
-          <a:xfrm>
-            <a:off x="3050000" y="3690000"/>
+          <p:cNvPr id="135" name="T"/>
+          <p:cNvSpPr/>
+          <p:nvPr/>
+        </p:nvSpPr>
+        <p:spPr>
+          <a:xfrm>
+            <a:off x="4020000" y="3730000"/>
             <a:ext cx="560000" cy="380000"/>
           </a:xfrm>
           <a:prstGeom prst="rect">
@@ -10769,13 +10807,13 @@
       </p:sp>
       <p:sp>
         <p:nvSpPr>
-          <p:cNvPr id="135" name="S"/>
-          <p:cNvSpPr/>
-          <p:nvPr/>
-        </p:nvSpPr>
-        <p:spPr>
-          <a:xfrm>
-            <a:off x="3690000" y="3690000"/>
+          <p:cNvPr id="136" name="S"/>
+          <p:cNvSpPr/>
+          <p:nvPr/>
+        </p:nvSpPr>
+        <p:spPr>
+          <a:xfrm>
+            <a:off x="5020000" y="3730000"/>
             <a:ext cx="560000" cy="380000"/>
           </a:xfrm>
           <a:prstGeom prst="roundRect">
@@ -10795,13 +10833,13 @@
       </p:sp>
       <p:sp>
         <p:nvSpPr>
-          <p:cNvPr id="136" name="T"/>
-          <p:cNvSpPr/>
-          <p:nvPr/>
-        </p:nvSpPr>
-        <p:spPr>
-          <a:xfrm>
-            <a:off x="3690000" y="3690000"/>
+          <p:cNvPr id="137" name="T"/>
+          <p:cNvSpPr/>
+          <p:nvPr/>
+        </p:nvSpPr>
+        <p:spPr>
+          <a:xfrm>
+            <a:off x="5020000" y="3730000"/>
             <a:ext cx="560000" cy="380000"/>
           </a:xfrm>
           <a:prstGeom prst="rect">
@@ -10833,13 +10871,13 @@
       </p:sp>
       <p:sp>
         <p:nvSpPr>
-          <p:cNvPr id="137" name="S"/>
-          <p:cNvSpPr/>
-          <p:nvPr/>
-        </p:nvSpPr>
-        <p:spPr>
-          <a:xfrm>
-            <a:off x="5370000" y="3690000"/>
+          <p:cNvPr id="138" name="S"/>
+          <p:cNvSpPr/>
+          <p:nvPr/>
+        </p:nvSpPr>
+        <p:spPr>
+          <a:xfrm>
+            <a:off x="8220000" y="3730000"/>
             <a:ext cx="560000" cy="380000"/>
           </a:xfrm>
           <a:prstGeom prst="roundRect">
@@ -10859,13 +10897,13 @@
       </p:sp>
       <p:sp>
         <p:nvSpPr>
-          <p:cNvPr id="138" name="T"/>
-          <p:cNvSpPr/>
-          <p:nvPr/>
-        </p:nvSpPr>
-        <p:spPr>
-          <a:xfrm>
-            <a:off x="5370000" y="3690000"/>
+          <p:cNvPr id="139" name="T"/>
+          <p:cNvSpPr/>
+          <p:nvPr/>
+        </p:nvSpPr>
+        <p:spPr>
+          <a:xfrm>
+            <a:off x="8220000" y="3730000"/>
             <a:ext cx="560000" cy="380000"/>
           </a:xfrm>
           <a:prstGeom prst="rect">
@@ -10897,14 +10935,14 @@
       </p:sp>
       <p:sp>
         <p:nvSpPr>
-          <p:cNvPr id="139" name="T"/>
-          <p:cNvSpPr/>
-          <p:nvPr/>
-        </p:nvSpPr>
-        <p:spPr>
-          <a:xfrm>
-            <a:off x="6260000" y="1180000"/>
-            <a:ext cx="900000" cy="300000"/>
+          <p:cNvPr id="140" name="T"/>
+          <p:cNvSpPr/>
+          <p:nvPr/>
+        </p:nvSpPr>
+        <p:spPr>
+          <a:xfrm>
+            <a:off x="9150000" y="1180000"/>
+            <a:ext cx="1900000" cy="300000"/>
           </a:xfrm>
           <a:prstGeom prst="rect">
             <a:avLst/>
@@ -10916,33 +10954,71 @@
           <a:bodyPr wrap="square" lIns="0" tIns="0" rIns="0" bIns="0" rtlCol="0" anchor="ctr"/>
           <a:lstStyle/>
           <a:p>
+            <a:pPr algn="l" indent="0" marL="0">
+              <a:buNone/>
+            </a:pPr>
+            <a:r>
+              <a:rPr lang="ru-RU" sz="1100" b="1" kern="0" dirty="0">
+                <a:solidFill>
+                  <a:srgbClr val="9C5BD0"/>
+                </a:solidFill>
+                <a:latin typeface="Calibri" pitchFamily="34" charset="0"/>
+                <a:ea typeface="Calibri" pitchFamily="34" charset="-122"/>
+                <a:cs typeface="Calibri" pitchFamily="34" charset="-120"/>
+              </a:rPr>
+              <a:t>выход: hₜ → архетип</a:t>
+            </a:r>
+          </a:p>
+        </p:txBody>
+      </p:sp>
+      <p:sp>
+        <p:nvSpPr>
+          <p:cNvPr id="141" name="T"/>
+          <p:cNvSpPr/>
+          <p:nvPr/>
+        </p:nvSpPr>
+        <p:spPr>
+          <a:xfrm>
+            <a:off x="1350000" y="5120000"/>
+            <a:ext cx="2300000" cy="300000"/>
+          </a:xfrm>
+          <a:prstGeom prst="rect">
+            <a:avLst/>
+          </a:prstGeom>
+          <a:noFill/>
+          <a:ln/>
+        </p:spPr>
+        <p:txBody>
+          <a:bodyPr wrap="square" lIns="0" tIns="0" rIns="0" bIns="0" rtlCol="0" anchor="ctr"/>
+          <a:lstStyle/>
+          <a:p>
             <a:pPr algn="ctr" indent="0" marL="0">
               <a:buNone/>
             </a:pPr>
             <a:r>
-              <a:rPr lang="ru-RU" sz="1400" b="1" kern="0" dirty="0">
-                <a:solidFill>
-                  <a:srgbClr val="9C5BD0"/>
-                </a:solidFill>
-                <a:latin typeface="Calibri" pitchFamily="34" charset="0"/>
-                <a:ea typeface="Calibri" pitchFamily="34" charset="-122"/>
-                <a:cs typeface="Calibri" pitchFamily="34" charset="-120"/>
-              </a:rPr>
-              <a:t>hₜ</a:t>
-            </a:r>
-          </a:p>
-        </p:txBody>
-      </p:sp>
-      <p:sp>
-        <p:nvSpPr>
-          <p:cNvPr id="140" name="T"/>
-          <p:cNvSpPr/>
-          <p:nvPr/>
-        </p:nvSpPr>
-        <p:spPr>
-          <a:xfrm>
-            <a:off x="6080000" y="1980000"/>
-            <a:ext cx="880000" cy="260000"/>
+              <a:rPr lang="ru-RU" sz="1250" b="1" kern="0" dirty="0">
+                <a:solidFill>
+                  <a:srgbClr val="0E7FB8"/>
+                </a:solidFill>
+                <a:latin typeface="Calibri" pitchFamily="34" charset="0"/>
+                <a:ea typeface="Calibri" pitchFamily="34" charset="-122"/>
+                <a:cs typeface="Calibri" pitchFamily="34" charset="-120"/>
+              </a:rPr>
+              <a:t>Забывание</a:t>
+            </a:r>
+          </a:p>
+        </p:txBody>
+      </p:sp>
+      <p:sp>
+        <p:nvSpPr>
+          <p:cNvPr id="142" name="T"/>
+          <p:cNvSpPr/>
+          <p:nvPr/>
+        </p:nvSpPr>
+        <p:spPr>
+          <a:xfrm>
+            <a:off x="1200000" y="5430000"/>
+            <a:ext cx="2600000" cy="300000"/>
           </a:xfrm>
           <a:prstGeom prst="rect">
             <a:avLst/>
@@ -10954,53 +11030,33 @@
           <a:bodyPr wrap="square" lIns="0" tIns="0" rIns="0" bIns="0" rtlCol="0" anchor="ctr"/>
           <a:lstStyle/>
           <a:p>
-            <a:pPr algn="r" indent="0" marL="0">
-              <a:buNone/>
-            </a:pPr>
-            <a:r>
-              <a:rPr lang="ru-RU" sz="1000" b="1" kern="0" dirty="0">
-                <a:solidFill>
-                  <a:srgbClr val="4A5560"/>
-                </a:solidFill>
-                <a:latin typeface="Calibri" pitchFamily="34" charset="0"/>
-                <a:ea typeface="Calibri" pitchFamily="34" charset="-122"/>
-                <a:cs typeface="Calibri" pitchFamily="34" charset="-120"/>
-              </a:rPr>
-              <a:t>Cₜ</a:t>
-            </a:r>
-          </a:p>
-        </p:txBody>
-      </p:sp>
-      <p:sp>
-        <p:nvSpPr>
-          <p:cNvPr id="141" name="S"/>
-          <p:cNvSpPr/>
-          <p:nvPr/>
-        </p:nvSpPr>
-        <p:spPr>
-          <a:xfrm>
-            <a:off x="7480000" y="1940000"/>
-            <a:ext cx="150000" cy="150000"/>
-          </a:xfrm>
-          <a:prstGeom prst="ellipse">
-            <a:avLst/>
-          </a:prstGeom>
-          <a:solidFill>
-            <a:srgbClr val="1F9BD8"/>
-          </a:solidFill>
-          <a:ln/>
-        </p:spPr>
-      </p:sp>
-      <p:sp>
-        <p:nvSpPr>
-          <p:cNvPr id="142" name="T"/>
-          <p:cNvSpPr/>
-          <p:nvPr/>
-        </p:nvSpPr>
-        <p:spPr>
-          <a:xfrm>
-            <a:off x="7740000" y="1900000"/>
-            <a:ext cx="3900000" cy="300000"/>
+            <a:pPr algn="ctr" indent="0" marL="0">
+              <a:buNone/>
+            </a:pPr>
+            <a:r>
+              <a:rPr lang="ru-RU" sz="1050" kern="0" dirty="0">
+                <a:solidFill>
+                  <a:srgbClr val="6B7480"/>
+                </a:solidFill>
+                <a:latin typeface="Calibri" pitchFamily="34" charset="0"/>
+                <a:ea typeface="Calibri" pitchFamily="34" charset="-122"/>
+                <a:cs typeface="Calibri" pitchFamily="34" charset="-120"/>
+              </a:rPr>
+              <a:t>стереть лишнее из памяти  (σ)</a:t>
+            </a:r>
+          </a:p>
+        </p:txBody>
+      </p:sp>
+      <p:sp>
+        <p:nvSpPr>
+          <p:cNvPr id="143" name="T"/>
+          <p:cNvSpPr/>
+          <p:nvPr/>
+        </p:nvSpPr>
+        <p:spPr>
+          <a:xfrm>
+            <a:off x="3650000" y="5120000"/>
+            <a:ext cx="2300000" cy="300000"/>
           </a:xfrm>
           <a:prstGeom prst="rect">
             <a:avLst/>
@@ -11012,49 +11068,49 @@
           <a:bodyPr wrap="square" lIns="0" tIns="0" rIns="0" bIns="0" rtlCol="0" anchor="ctr"/>
           <a:lstStyle/>
           <a:p>
-            <a:pPr algn="l" indent="0" marL="0">
+            <a:pPr algn="ctr" indent="0" marL="0">
               <a:buNone/>
             </a:pPr>
             <a:r>
               <a:rPr lang="ru-RU" sz="1250" b="1" kern="0" dirty="0">
                 <a:solidFill>
-                  <a:srgbClr val="111418"/>
-                </a:solidFill>
-                <a:latin typeface="Calibri" pitchFamily="34" charset="0"/>
-                <a:ea typeface="Calibri" pitchFamily="34" charset="-122"/>
-                <a:cs typeface="Calibri" pitchFamily="34" charset="-120"/>
-              </a:rPr>
-              <a:t>Состояние ячейки C</a:t>
-            </a:r>
-          </a:p>
-        </p:txBody>
-      </p:sp>
-      <p:sp>
-        <p:nvSpPr>
-          <p:cNvPr id="143" name="T"/>
-          <p:cNvSpPr/>
-          <p:nvPr/>
-        </p:nvSpPr>
-        <p:spPr>
-          <a:xfrm>
-            <a:off x="7740000" y="2230000"/>
-            <a:ext cx="3900000" cy="420000"/>
-          </a:xfrm>
-          <a:prstGeom prst="rect">
-            <a:avLst/>
-          </a:prstGeom>
-          <a:noFill/>
-          <a:ln/>
-        </p:spPr>
-        <p:txBody>
-          <a:bodyPr wrap="square" lIns="0" tIns="0" rIns="0" bIns="0" rtlCol="0" anchor="t"/>
-          <a:lstStyle/>
-          <a:p>
-            <a:pPr algn="l" indent="0" marL="0">
-              <a:buNone/>
-            </a:pPr>
-            <a:r>
-              <a:rPr lang="ru-RU" sz="1100" kern="0" dirty="0">
+                  <a:srgbClr val="0E7FB8"/>
+                </a:solidFill>
+                <a:latin typeface="Calibri" pitchFamily="34" charset="0"/>
+                <a:ea typeface="Calibri" pitchFamily="34" charset="-122"/>
+                <a:cs typeface="Calibri" pitchFamily="34" charset="-120"/>
+              </a:rPr>
+              <a:t>Запись</a:t>
+            </a:r>
+          </a:p>
+        </p:txBody>
+      </p:sp>
+      <p:sp>
+        <p:nvSpPr>
+          <p:cNvPr id="144" name="T"/>
+          <p:cNvSpPr/>
+          <p:nvPr/>
+        </p:nvSpPr>
+        <p:spPr>
+          <a:xfrm>
+            <a:off x="3500000" y="5430000"/>
+            <a:ext cx="2600000" cy="300000"/>
+          </a:xfrm>
+          <a:prstGeom prst="rect">
+            <a:avLst/>
+          </a:prstGeom>
+          <a:noFill/>
+          <a:ln/>
+        </p:spPr>
+        <p:txBody>
+          <a:bodyPr wrap="square" lIns="0" tIns="0" rIns="0" bIns="0" rtlCol="0" anchor="ctr"/>
+          <a:lstStyle/>
+          <a:p>
+            <a:pPr algn="ctr" indent="0" marL="0">
+              <a:buNone/>
+            </a:pPr>
+            <a:r>
+              <a:rPr lang="ru-RU" sz="1050" kern="0" dirty="0">
                 <a:solidFill>
                   <a:srgbClr val="6B7480"/>
                 </a:solidFill>
@@ -11062,30 +11118,10 @@
                 <a:ea typeface="Calibri" pitchFamily="34" charset="-122"/>
                 <a:cs typeface="Calibri" pitchFamily="34" charset="-120"/>
               </a:rPr>
-              <a:t>«долгая память» — течёт по верхней линии почти без изменений</a:t>
-            </a:r>
-          </a:p>
-        </p:txBody>
-      </p:sp>
-      <p:sp>
-        <p:nvSpPr>
-          <p:cNvPr id="144" name="S"/>
-          <p:cNvSpPr/>
-          <p:nvPr/>
-        </p:nvSpPr>
-        <p:spPr>
-          <a:xfrm>
-            <a:off x="7480000" y="2760000"/>
-            <a:ext cx="150000" cy="150000"/>
-          </a:xfrm>
-          <a:prstGeom prst="ellipse">
-            <a:avLst/>
-          </a:prstGeom>
-          <a:solidFill>
-            <a:srgbClr val="1F9BD8"/>
-          </a:solidFill>
-          <a:ln/>
-        </p:spPr>
+              <a:t>добавить новое  (σ · tanh)</a:t>
+            </a:r>
+          </a:p>
+        </p:txBody>
       </p:sp>
       <p:sp>
         <p:nvSpPr>
@@ -11095,8 +11131,8 @@
         </p:nvSpPr>
         <p:spPr>
           <a:xfrm>
-            <a:off x="7740000" y="2720000"/>
-            <a:ext cx="3900000" cy="300000"/>
+            <a:off x="7350000" y="5120000"/>
+            <a:ext cx="2300000" cy="300000"/>
           </a:xfrm>
           <a:prstGeom prst="rect">
             <a:avLst/>
@@ -11108,19 +11144,19 @@
           <a:bodyPr wrap="square" lIns="0" tIns="0" rIns="0" bIns="0" rtlCol="0" anchor="ctr"/>
           <a:lstStyle/>
           <a:p>
-            <a:pPr algn="l" indent="0" marL="0">
+            <a:pPr algn="ctr" indent="0" marL="0">
               <a:buNone/>
             </a:pPr>
             <a:r>
               <a:rPr lang="ru-RU" sz="1250" b="1" kern="0" dirty="0">
                 <a:solidFill>
-                  <a:srgbClr val="111418"/>
-                </a:solidFill>
-                <a:latin typeface="Calibri" pitchFamily="34" charset="0"/>
-                <a:ea typeface="Calibri" pitchFamily="34" charset="-122"/>
-                <a:cs typeface="Calibri" pitchFamily="34" charset="-120"/>
-              </a:rPr>
-              <a:t>Гейт забывания σ</a:t>
+                  <a:srgbClr val="0E7FB8"/>
+                </a:solidFill>
+                <a:latin typeface="Calibri" pitchFamily="34" charset="0"/>
+                <a:ea typeface="Calibri" pitchFamily="34" charset="-122"/>
+                <a:cs typeface="Calibri" pitchFamily="34" charset="-120"/>
+              </a:rPr>
+              <a:t>Выход</a:t>
             </a:r>
           </a:p>
         </p:txBody>
@@ -11133,24 +11169,24 @@
         </p:nvSpPr>
         <p:spPr>
           <a:xfrm>
-            <a:off x="7740000" y="3050000"/>
-            <a:ext cx="3900000" cy="420000"/>
-          </a:xfrm>
-          <a:prstGeom prst="rect">
-            <a:avLst/>
-          </a:prstGeom>
-          <a:noFill/>
-          <a:ln/>
-        </p:spPr>
-        <p:txBody>
-          <a:bodyPr wrap="square" lIns="0" tIns="0" rIns="0" bIns="0" rtlCol="0" anchor="t"/>
-          <a:lstStyle/>
-          <a:p>
-            <a:pPr algn="l" indent="0" marL="0">
-              <a:buNone/>
-            </a:pPr>
-            <a:r>
-              <a:rPr lang="ru-RU" sz="1100" kern="0" dirty="0">
+            <a:off x="7200000" y="5430000"/>
+            <a:ext cx="2600000" cy="300000"/>
+          </a:xfrm>
+          <a:prstGeom prst="rect">
+            <a:avLst/>
+          </a:prstGeom>
+          <a:noFill/>
+          <a:ln/>
+        </p:spPr>
+        <p:txBody>
+          <a:bodyPr wrap="square" lIns="0" tIns="0" rIns="0" bIns="0" rtlCol="0" anchor="ctr"/>
+          <a:lstStyle/>
+          <a:p>
+            <a:pPr algn="ctr" indent="0" marL="0">
+              <a:buNone/>
+            </a:pPr>
+            <a:r>
+              <a:rPr lang="ru-RU" sz="1050" kern="0" dirty="0">
                 <a:solidFill>
                   <a:srgbClr val="6B7480"/>
                 </a:solidFill>
@@ -11158,199 +11194,7 @@
                 <a:ea typeface="Calibri" pitchFamily="34" charset="-122"/>
                 <a:cs typeface="Calibri" pitchFamily="34" charset="-120"/>
               </a:rPr>
-              <a:t>решает, какую часть памяти стереть</a:t>
-            </a:r>
-          </a:p>
-        </p:txBody>
-      </p:sp>
-      <p:sp>
-        <p:nvSpPr>
-          <p:cNvPr id="147" name="S"/>
-          <p:cNvSpPr/>
-          <p:nvPr/>
-        </p:nvSpPr>
-        <p:spPr>
-          <a:xfrm>
-            <a:off x="7480000" y="3580000"/>
-            <a:ext cx="150000" cy="150000"/>
-          </a:xfrm>
-          <a:prstGeom prst="ellipse">
-            <a:avLst/>
-          </a:prstGeom>
-          <a:solidFill>
-            <a:srgbClr val="1F9BD8"/>
-          </a:solidFill>
-          <a:ln/>
-        </p:spPr>
-      </p:sp>
-      <p:sp>
-        <p:nvSpPr>
-          <p:cNvPr id="148" name="T"/>
-          <p:cNvSpPr/>
-          <p:nvPr/>
-        </p:nvSpPr>
-        <p:spPr>
-          <a:xfrm>
-            <a:off x="7740000" y="3540000"/>
-            <a:ext cx="3900000" cy="300000"/>
-          </a:xfrm>
-          <a:prstGeom prst="rect">
-            <a:avLst/>
-          </a:prstGeom>
-          <a:noFill/>
-          <a:ln/>
-        </p:spPr>
-        <p:txBody>
-          <a:bodyPr wrap="square" lIns="0" tIns="0" rIns="0" bIns="0" rtlCol="0" anchor="ctr"/>
-          <a:lstStyle/>
-          <a:p>
-            <a:pPr algn="l" indent="0" marL="0">
-              <a:buNone/>
-            </a:pPr>
-            <a:r>
-              <a:rPr lang="ru-RU" sz="1250" b="1" kern="0" dirty="0">
-                <a:solidFill>
-                  <a:srgbClr val="111418"/>
-                </a:solidFill>
-                <a:latin typeface="Calibri" pitchFamily="34" charset="0"/>
-                <a:ea typeface="Calibri" pitchFamily="34" charset="-122"/>
-                <a:cs typeface="Calibri" pitchFamily="34" charset="-120"/>
-              </a:rPr>
-              <a:t>Входной гейт σ · tanh</a:t>
-            </a:r>
-          </a:p>
-        </p:txBody>
-      </p:sp>
-      <p:sp>
-        <p:nvSpPr>
-          <p:cNvPr id="149" name="T"/>
-          <p:cNvSpPr/>
-          <p:nvPr/>
-        </p:nvSpPr>
-        <p:spPr>
-          <a:xfrm>
-            <a:off x="7740000" y="3870000"/>
-            <a:ext cx="3900000" cy="420000"/>
-          </a:xfrm>
-          <a:prstGeom prst="rect">
-            <a:avLst/>
-          </a:prstGeom>
-          <a:noFill/>
-          <a:ln/>
-        </p:spPr>
-        <p:txBody>
-          <a:bodyPr wrap="square" lIns="0" tIns="0" rIns="0" bIns="0" rtlCol="0" anchor="t"/>
-          <a:lstStyle/>
-          <a:p>
-            <a:pPr algn="l" indent="0" marL="0">
-              <a:buNone/>
-            </a:pPr>
-            <a:r>
-              <a:rPr lang="ru-RU" sz="1100" kern="0" dirty="0">
-                <a:solidFill>
-                  <a:srgbClr val="6B7480"/>
-                </a:solidFill>
-                <a:latin typeface="Calibri" pitchFamily="34" charset="0"/>
-                <a:ea typeface="Calibri" pitchFamily="34" charset="-122"/>
-                <a:cs typeface="Calibri" pitchFamily="34" charset="-120"/>
-              </a:rPr>
-              <a:t>выбирает, какую новую информацию записать</a:t>
-            </a:r>
-          </a:p>
-        </p:txBody>
-      </p:sp>
-      <p:sp>
-        <p:nvSpPr>
-          <p:cNvPr id="150" name="S"/>
-          <p:cNvSpPr/>
-          <p:nvPr/>
-        </p:nvSpPr>
-        <p:spPr>
-          <a:xfrm>
-            <a:off x="7480000" y="4400000"/>
-            <a:ext cx="150000" cy="150000"/>
-          </a:xfrm>
-          <a:prstGeom prst="ellipse">
-            <a:avLst/>
-          </a:prstGeom>
-          <a:solidFill>
-            <a:srgbClr val="1F9BD8"/>
-          </a:solidFill>
-          <a:ln/>
-        </p:spPr>
-      </p:sp>
-      <p:sp>
-        <p:nvSpPr>
-          <p:cNvPr id="151" name="T"/>
-          <p:cNvSpPr/>
-          <p:nvPr/>
-        </p:nvSpPr>
-        <p:spPr>
-          <a:xfrm>
-            <a:off x="7740000" y="4360000"/>
-            <a:ext cx="3900000" cy="300000"/>
-          </a:xfrm>
-          <a:prstGeom prst="rect">
-            <a:avLst/>
-          </a:prstGeom>
-          <a:noFill/>
-          <a:ln/>
-        </p:spPr>
-        <p:txBody>
-          <a:bodyPr wrap="square" lIns="0" tIns="0" rIns="0" bIns="0" rtlCol="0" anchor="ctr"/>
-          <a:lstStyle/>
-          <a:p>
-            <a:pPr algn="l" indent="0" marL="0">
-              <a:buNone/>
-            </a:pPr>
-            <a:r>
-              <a:rPr lang="ru-RU" sz="1250" b="1" kern="0" dirty="0">
-                <a:solidFill>
-                  <a:srgbClr val="111418"/>
-                </a:solidFill>
-                <a:latin typeface="Calibri" pitchFamily="34" charset="0"/>
-                <a:ea typeface="Calibri" pitchFamily="34" charset="-122"/>
-                <a:cs typeface="Calibri" pitchFamily="34" charset="-120"/>
-              </a:rPr>
-              <a:t>Выходной гейт σ · tanh</a:t>
-            </a:r>
-          </a:p>
-        </p:txBody>
-      </p:sp>
-      <p:sp>
-        <p:nvSpPr>
-          <p:cNvPr id="152" name="T"/>
-          <p:cNvSpPr/>
-          <p:nvPr/>
-        </p:nvSpPr>
-        <p:spPr>
-          <a:xfrm>
-            <a:off x="7740000" y="4690000"/>
-            <a:ext cx="3900000" cy="420000"/>
-          </a:xfrm>
-          <a:prstGeom prst="rect">
-            <a:avLst/>
-          </a:prstGeom>
-          <a:noFill/>
-          <a:ln/>
-        </p:spPr>
-        <p:txBody>
-          <a:bodyPr wrap="square" lIns="0" tIns="0" rIns="0" bIns="0" rtlCol="0" anchor="t"/>
-          <a:lstStyle/>
-          <a:p>
-            <a:pPr algn="l" indent="0" marL="0">
-              <a:buNone/>
-            </a:pPr>
-            <a:r>
-              <a:rPr lang="ru-RU" sz="1100" kern="0" dirty="0">
-                <a:solidFill>
-                  <a:srgbClr val="6B7480"/>
-                </a:solidFill>
-                <a:latin typeface="Calibri" pitchFamily="34" charset="0"/>
-                <a:ea typeface="Calibri" pitchFamily="34" charset="-122"/>
-                <a:cs typeface="Calibri" pitchFamily="34" charset="-120"/>
-              </a:rPr>
-              <a:t>формирует выход hₜ из состояния ячейки</a:t>
+              <a:t>сформировать ответ hₜ  (σ · tanh)</a:t>
             </a:r>
           </a:p>
         </p:txBody>

--- a/presentations/Изотов_ВКР_нейросетевая-модель_LSTM.pptx
+++ b/presentations/Изотов_ВКР_нейросетевая-модель_LSTM.pptx
@@ -3251,7 +3251,7 @@
               <a:buNone/>
             </a:pPr>
             <a:r>
-              <a:rPr lang="ru-RU" sz="1250" b="1" spc="250" kern="0" dirty="0">
+              <a:rPr lang="ru-RU" sz="1500" b="1" spc="250" kern="0" dirty="0">
                 <a:solidFill>
                   <a:srgbClr val="1F9BD8"/>
                 </a:solidFill>
@@ -4510,7 +4510,7 @@
               <a:buNone/>
             </a:pPr>
             <a:r>
-              <a:rPr lang="ru-RU" sz="1250" b="1" kern="0" dirty="0">
+              <a:rPr lang="ru-RU" sz="1500" b="1" kern="0" dirty="0">
                 <a:solidFill>
                   <a:srgbClr val="1F9BD8"/>
                 </a:solidFill>
@@ -4518,7 +4518,7 @@
                 <a:ea typeface="Calibri" pitchFamily="34" charset="-122"/>
                 <a:cs typeface="Calibri" pitchFamily="34" charset="-120"/>
               </a:rPr>
-              <a:t>О ПРОЕКТЕ</a:t>
+              <a:t>ПРОБЛЕМАТИКА</a:t>
             </a:r>
           </a:p>
         </p:txBody>
@@ -4532,7 +4532,7 @@
         <p:spPr>
           <a:xfrm>
             <a:off x="640080" y="749808"/>
-            <a:ext cx="10000000" cy="640080"/>
+            <a:ext cx="10200000" cy="640080"/>
           </a:xfrm>
           <a:prstGeom prst="rect">
             <a:avLst/>
@@ -4548,7 +4548,7 @@
               <a:buNone/>
             </a:pPr>
             <a:r>
-              <a:rPr lang="ru-RU" sz="3000" b="1" kern="0" dirty="0">
+              <a:rPr lang="ru-RU" sz="2800" b="1" kern="0" dirty="0">
                 <a:solidFill>
                   <a:srgbClr val="111418"/>
                 </a:solidFill>
@@ -4556,7 +4556,7 @@
                 <a:ea typeface="Cambria" pitchFamily="34" charset="-122"/>
                 <a:cs typeface="Cambria" pitchFamily="34" charset="-120"/>
               </a:rPr>
-              <a:t>Адаптивная игровая система</a:t>
+              <a:t>Отсутствие адаптивного геймдизайна</a:t>
             </a:r>
           </a:p>
         </p:txBody>
@@ -4632,7 +4632,7 @@
                 <a:ea typeface="Calibri" pitchFamily="34" charset="-122"/>
                 <a:cs typeface="Calibri" pitchFamily="34" charset="-120"/>
               </a:rPr>
-              <a:t>Игра подстраивается под игрока в реальном времени: телеметрия → анализ → адаптация. Три части работают как единый цикл.</a:t>
+              <a:t>Большинство игр одинаковы для всех и не подстраиваются под стиль конкретного игрока.</a:t>
             </a:r>
           </a:p>
         </p:txBody>
@@ -4690,30 +4690,44 @@
           <a:ln/>
         </p:spPr>
       </p:sp>
-      <p:pic>
-        <p:nvPicPr>
-          <p:cNvPr id="107" name="I"/>
-          <p:cNvPicPr>
-            <a:picLocks noChangeAspect="1"/>
-          </p:cNvPicPr>
-          <p:nvPr/>
-        </p:nvPicPr>
-        <p:blipFill>
-          <a:blip r:embed="rId2"/>
-          <a:stretch>
-            <a:fillRect/>
-          </a:stretch>
-        </p:blipFill>
-        <p:spPr>
-          <a:xfrm>
-            <a:off x="2197440" y="2640000"/>
-            <a:ext cx="360000" cy="360000"/>
-          </a:xfrm>
-          <a:prstGeom prst="rect">
-            <a:avLst/>
-          </a:prstGeom>
-        </p:spPr>
-      </p:pic>
+      <p:sp>
+        <p:nvSpPr>
+          <p:cNvPr id="107" name="T"/>
+          <p:cNvSpPr/>
+          <p:nvPr/>
+        </p:nvSpPr>
+        <p:spPr>
+          <a:xfrm>
+            <a:off x="2037440" y="2480000"/>
+            <a:ext cx="680000" cy="680000"/>
+          </a:xfrm>
+          <a:prstGeom prst="rect">
+            <a:avLst/>
+          </a:prstGeom>
+          <a:noFill/>
+          <a:ln/>
+        </p:spPr>
+        <p:txBody>
+          <a:bodyPr wrap="square" lIns="0" tIns="0" rIns="0" bIns="0" rtlCol="0" anchor="ctr"/>
+          <a:lstStyle/>
+          <a:p>
+            <a:pPr algn="ctr" indent="0" marL="0">
+              <a:buNone/>
+            </a:pPr>
+            <a:r>
+              <a:rPr lang="ru-RU" sz="2400" b="1" kern="0" dirty="0">
+                <a:solidFill>
+                  <a:srgbClr val="FFFFFF"/>
+                </a:solidFill>
+                <a:latin typeface="Calibri" pitchFamily="34" charset="0"/>
+                <a:ea typeface="Calibri" pitchFamily="34" charset="-122"/>
+                <a:cs typeface="Calibri" pitchFamily="34" charset="-120"/>
+              </a:rPr>
+              <a:t>1</a:t>
+            </a:r>
+          </a:p>
+        </p:txBody>
+      </p:sp>
       <p:sp>
         <p:nvSpPr>
           <p:cNvPr id="108" name="T"/>
@@ -4722,8 +4736,8 @@
         </p:nvSpPr>
         <p:spPr>
           <a:xfrm>
-            <a:off x="940080" y="3360000"/>
-            <a:ext cx="2874720" cy="400000"/>
+            <a:off x="900080" y="3360000"/>
+            <a:ext cx="2954720" cy="440000"/>
           </a:xfrm>
           <a:prstGeom prst="rect">
             <a:avLst/>
@@ -4739,7 +4753,7 @@
               <a:buNone/>
             </a:pPr>
             <a:r>
-              <a:rPr lang="ru-RU" sz="1700" b="1" kern="0" dirty="0">
+              <a:rPr lang="ru-RU" sz="1600" b="1" kern="0" dirty="0">
                 <a:solidFill>
                   <a:srgbClr val="111418"/>
                 </a:solidFill>
@@ -4747,7 +4761,7 @@
                 <a:ea typeface="Cambria" pitchFamily="34" charset="-122"/>
                 <a:cs typeface="Cambria" pitchFamily="34" charset="-120"/>
               </a:rPr>
-              <a:t>Клиент</a:t>
+              <a:t>Один баланс для всех</a:t>
             </a:r>
           </a:p>
         </p:txBody>
@@ -4760,8 +4774,8 @@
         </p:nvSpPr>
         <p:spPr>
           <a:xfrm>
-            <a:off x="940080" y="3840000"/>
-            <a:ext cx="2874720" cy="640000"/>
+            <a:off x="900080" y="3880000"/>
+            <a:ext cx="2954720" cy="560000"/>
           </a:xfrm>
           <a:prstGeom prst="rect">
             <a:avLst/>
@@ -4785,7 +4799,7 @@
                 <a:ea typeface="Calibri" pitchFamily="34" charset="-122"/>
                 <a:cs typeface="Calibri" pitchFamily="34" charset="-120"/>
               </a:rPr>
-              <a:t>Godot собирает события игрока и отправляет телеметрию</a:t>
+              <a:t>стиль игрока не учитывается</a:t>
             </a:r>
           </a:p>
         </p:txBody>
@@ -4843,30 +4857,44 @@
           <a:ln/>
         </p:spPr>
       </p:sp>
-      <p:pic>
-        <p:nvPicPr>
-          <p:cNvPr id="112" name="I"/>
-          <p:cNvPicPr>
-            <a:picLocks noChangeAspect="1"/>
-          </p:cNvPicPr>
-          <p:nvPr/>
-        </p:nvPicPr>
-        <p:blipFill>
-          <a:blip r:embed="rId3"/>
-          <a:stretch>
-            <a:fillRect/>
-          </a:stretch>
-        </p:blipFill>
-        <p:spPr>
-          <a:xfrm>
-            <a:off x="5909904" y="2640000"/>
-            <a:ext cx="360000" cy="360000"/>
-          </a:xfrm>
-          <a:prstGeom prst="rect">
-            <a:avLst/>
-          </a:prstGeom>
-        </p:spPr>
-      </p:pic>
+      <p:sp>
+        <p:nvSpPr>
+          <p:cNvPr id="112" name="T"/>
+          <p:cNvSpPr/>
+          <p:nvPr/>
+        </p:nvSpPr>
+        <p:spPr>
+          <a:xfrm>
+            <a:off x="5749904" y="2480000"/>
+            <a:ext cx="680000" cy="680000"/>
+          </a:xfrm>
+          <a:prstGeom prst="rect">
+            <a:avLst/>
+          </a:prstGeom>
+          <a:noFill/>
+          <a:ln/>
+        </p:spPr>
+        <p:txBody>
+          <a:bodyPr wrap="square" lIns="0" tIns="0" rIns="0" bIns="0" rtlCol="0" anchor="ctr"/>
+          <a:lstStyle/>
+          <a:p>
+            <a:pPr algn="ctr" indent="0" marL="0">
+              <a:buNone/>
+            </a:pPr>
+            <a:r>
+              <a:rPr lang="ru-RU" sz="2400" b="1" kern="0" dirty="0">
+                <a:solidFill>
+                  <a:srgbClr val="FFFFFF"/>
+                </a:solidFill>
+                <a:latin typeface="Calibri" pitchFamily="34" charset="0"/>
+                <a:ea typeface="Calibri" pitchFamily="34" charset="-122"/>
+                <a:cs typeface="Calibri" pitchFamily="34" charset="-120"/>
+              </a:rPr>
+              <a:t>2</a:t>
+            </a:r>
+          </a:p>
+        </p:txBody>
+      </p:sp>
       <p:sp>
         <p:nvSpPr>
           <p:cNvPr id="113" name="T"/>
@@ -4875,8 +4903,8 @@
         </p:nvSpPr>
         <p:spPr>
           <a:xfrm>
-            <a:off x="4652544" y="3360000"/>
-            <a:ext cx="2874720" cy="400000"/>
+            <a:off x="4612544" y="3360000"/>
+            <a:ext cx="2954720" cy="440000"/>
           </a:xfrm>
           <a:prstGeom prst="rect">
             <a:avLst/>
@@ -4892,7 +4920,7 @@
               <a:buNone/>
             </a:pPr>
             <a:r>
-              <a:rPr lang="ru-RU" sz="1700" b="1" kern="0" dirty="0">
+              <a:rPr lang="ru-RU" sz="1600" b="1" kern="0" dirty="0">
                 <a:solidFill>
                   <a:srgbClr val="111418"/>
                 </a:solidFill>
@@ -4900,7 +4928,7 @@
                 <a:ea typeface="Cambria" pitchFamily="34" charset="-122"/>
                 <a:cs typeface="Cambria" pitchFamily="34" charset="-120"/>
               </a:rPr>
-              <a:t>Сервер</a:t>
+              <a:t>Ручная настройка</a:t>
             </a:r>
           </a:p>
         </p:txBody>
@@ -4913,8 +4941,8 @@
         </p:nvSpPr>
         <p:spPr>
           <a:xfrm>
-            <a:off x="4652544" y="3840000"/>
-            <a:ext cx="2874720" cy="640000"/>
+            <a:off x="4612544" y="3880000"/>
+            <a:ext cx="2954720" cy="560000"/>
           </a:xfrm>
           <a:prstGeom prst="rect">
             <a:avLst/>
@@ -4938,7 +4966,7 @@
                 <a:ea typeface="Calibri" pitchFamily="34" charset="-122"/>
                 <a:cs typeface="Calibri" pitchFamily="34" charset="-120"/>
               </a:rPr>
-              <a:t>FastAPI + PostgreSQL принимает, хранит и строит признаки</a:t>
+              <a:t>сложность задаётся вслепую, одинаково</a:t>
             </a:r>
           </a:p>
         </p:txBody>
@@ -4996,30 +5024,44 @@
           <a:ln/>
         </p:spPr>
       </p:sp>
-      <p:pic>
-        <p:nvPicPr>
-          <p:cNvPr id="117" name="I"/>
-          <p:cNvPicPr>
-            <a:picLocks noChangeAspect="1"/>
-          </p:cNvPicPr>
-          <p:nvPr/>
-        </p:nvPicPr>
-        <p:blipFill>
-          <a:blip r:embed="rId4"/>
-          <a:stretch>
-            <a:fillRect/>
-          </a:stretch>
-        </p:blipFill>
-        <p:spPr>
-          <a:xfrm>
-            <a:off x="9622368" y="2640000"/>
-            <a:ext cx="360000" cy="360000"/>
-          </a:xfrm>
-          <a:prstGeom prst="rect">
-            <a:avLst/>
-          </a:prstGeom>
-        </p:spPr>
-      </p:pic>
+      <p:sp>
+        <p:nvSpPr>
+          <p:cNvPr id="117" name="T"/>
+          <p:cNvSpPr/>
+          <p:nvPr/>
+        </p:nvSpPr>
+        <p:spPr>
+          <a:xfrm>
+            <a:off x="9462368" y="2480000"/>
+            <a:ext cx="680000" cy="680000"/>
+          </a:xfrm>
+          <a:prstGeom prst="rect">
+            <a:avLst/>
+          </a:prstGeom>
+          <a:noFill/>
+          <a:ln/>
+        </p:spPr>
+        <p:txBody>
+          <a:bodyPr wrap="square" lIns="0" tIns="0" rIns="0" bIns="0" rtlCol="0" anchor="ctr"/>
+          <a:lstStyle/>
+          <a:p>
+            <a:pPr algn="ctr" indent="0" marL="0">
+              <a:buNone/>
+            </a:pPr>
+            <a:r>
+              <a:rPr lang="ru-RU" sz="2400" b="1" kern="0" dirty="0">
+                <a:solidFill>
+                  <a:srgbClr val="FFFFFF"/>
+                </a:solidFill>
+                <a:latin typeface="Calibri" pitchFamily="34" charset="0"/>
+                <a:ea typeface="Calibri" pitchFamily="34" charset="-122"/>
+                <a:cs typeface="Calibri" pitchFamily="34" charset="-120"/>
+              </a:rPr>
+              <a:t>3</a:t>
+            </a:r>
+          </a:p>
+        </p:txBody>
+      </p:sp>
       <p:sp>
         <p:nvSpPr>
           <p:cNvPr id="118" name="T"/>
@@ -5028,8 +5070,8 @@
         </p:nvSpPr>
         <p:spPr>
           <a:xfrm>
-            <a:off x="8365008" y="3360000"/>
-            <a:ext cx="2874720" cy="400000"/>
+            <a:off x="8325008" y="3360000"/>
+            <a:ext cx="2954720" cy="440000"/>
           </a:xfrm>
           <a:prstGeom prst="rect">
             <a:avLst/>
@@ -5045,7 +5087,7 @@
               <a:buNone/>
             </a:pPr>
             <a:r>
-              <a:rPr lang="ru-RU" sz="1700" b="1" kern="0" dirty="0">
+              <a:rPr lang="ru-RU" sz="1600" b="1" kern="0" dirty="0">
                 <a:solidFill>
                   <a:srgbClr val="111418"/>
                 </a:solidFill>
@@ -5053,7 +5095,7 @@
                 <a:ea typeface="Cambria" pitchFamily="34" charset="-122"/>
                 <a:cs typeface="Cambria" pitchFamily="34" charset="-120"/>
               </a:rPr>
-              <a:t>Модель</a:t>
+              <a:t>Падение вовлечённости</a:t>
             </a:r>
           </a:p>
         </p:txBody>
@@ -5066,8 +5108,8 @@
         </p:nvSpPr>
         <p:spPr>
           <a:xfrm>
-            <a:off x="8365008" y="3840000"/>
-            <a:ext cx="2874720" cy="640000"/>
+            <a:off x="8325008" y="3880000"/>
+            <a:ext cx="2954720" cy="560000"/>
           </a:xfrm>
           <a:prstGeom prst="rect">
             <a:avLst/>
@@ -5091,7 +5133,7 @@
                 <a:ea typeface="Calibri" pitchFamily="34" charset="-122"/>
                 <a:cs typeface="Calibri" pitchFamily="34" charset="-120"/>
               </a:rPr>
-              <a:t>нейросеть определяет архетип и возвращает адаптацию</a:t>
+              <a:t>игроки теряют интерес и уходят</a:t>
             </a:r>
           </a:p>
         </p:txBody>
@@ -5129,7 +5171,7 @@
                 <a:ea typeface="Calibri" pitchFamily="34" charset="-122"/>
                 <a:cs typeface="Calibri" pitchFamily="34" charset="-120"/>
               </a:rPr>
-              <a:t>Игра, сервер и модель образуют единый цикл адаптации.</a:t>
+              <a:t>Решение — адаптация геймплея под архетип игрока.</a:t>
             </a:r>
           </a:p>
         </p:txBody>
@@ -5192,7 +5234,7 @@
               <a:buNone/>
             </a:pPr>
             <a:r>
-              <a:rPr lang="ru-RU" sz="1250" b="1" kern="0" dirty="0">
+              <a:rPr lang="ru-RU" sz="1500" b="1" kern="0" dirty="0">
                 <a:solidFill>
                   <a:srgbClr val="1F9BD8"/>
                 </a:solidFill>
@@ -5200,7 +5242,7 @@
                 <a:ea typeface="Calibri" pitchFamily="34" charset="-122"/>
                 <a:cs typeface="Calibri" pitchFamily="34" charset="-120"/>
               </a:rPr>
-              <a:t>ПРОБЛЕМАТИКА</a:t>
+              <a:t>ВОВЛЕЧЁННОСТЬ ИГРОКОВ</a:t>
             </a:r>
           </a:p>
         </p:txBody>
@@ -5238,7 +5280,7 @@
                 <a:ea typeface="Cambria" pitchFamily="34" charset="-122"/>
                 <a:cs typeface="Cambria" pitchFamily="34" charset="-120"/>
               </a:rPr>
-              <a:t>Нет адаптивного геймдизайна</a:t>
+              <a:t>Игроки уходят по-разному</a:t>
             </a:r>
           </a:p>
         </p:txBody>
@@ -5314,7 +5356,7 @@
                 <a:ea typeface="Calibri" pitchFamily="34" charset="-122"/>
                 <a:cs typeface="Calibri" pitchFamily="34" charset="-120"/>
               </a:rPr>
-              <a:t>Классическая игра одинакова для всех и не подстраивается под стиль игрока. Разные типы игроков теряют интерес по-разному — без адаптации многие быстро уходят.</a:t>
+              <a:t>Без подстройки под стиль игрока разные типы игроков теряют интерес по-разному.</a:t>
             </a:r>
           </a:p>
         </p:txBody>
@@ -5851,7 +5893,7 @@
               <a:buNone/>
             </a:pPr>
             <a:r>
-              <a:rPr lang="en-US" sz="1250" b="1" spc="250" kern="0" dirty="0">
+              <a:rPr lang="en-US" sz="1500" b="1" spc="250" kern="0" dirty="0">
                 <a:solidFill>
                   <a:srgbClr val="1F9BD8"/>
                 </a:solidFill>
@@ -5861,7 +5903,7 @@
               </a:rPr>
               <a:t>АКТУАЛЬНОСТЬ</a:t>
             </a:r>
-            <a:endParaRPr lang="en-US" sz="1250" dirty="0"/>
+            <a:endParaRPr lang="en-US" sz="1500" dirty="0"/>
           </a:p>
         </p:txBody>
       </p:sp>
@@ -6498,7 +6540,7 @@
               <a:buNone/>
             </a:pPr>
             <a:r>
-              <a:rPr lang="en-US" sz="1250" b="1" spc="250" kern="0" dirty="0">
+              <a:rPr lang="en-US" sz="1500" b="1" spc="250" kern="0" dirty="0">
                 <a:solidFill>
                   <a:srgbClr val="1F9BD8"/>
                 </a:solidFill>
@@ -6508,7 +6550,7 @@
               </a:rPr>
               <a:t>АРХИТЕКТУРА</a:t>
             </a:r>
-            <a:endParaRPr lang="en-US" sz="1250" dirty="0"/>
+            <a:endParaRPr lang="en-US" sz="1500" dirty="0"/>
           </a:p>
         </p:txBody>
       </p:sp>
@@ -7415,7 +7457,7 @@
               <a:buNone/>
             </a:pPr>
             <a:r>
-              <a:rPr lang="en-US" sz="1250" b="1" spc="250" kern="0" dirty="0">
+              <a:rPr lang="en-US" sz="1500" b="1" spc="250" kern="0" dirty="0">
                 <a:solidFill>
                   <a:srgbClr val="1F9BD8"/>
                 </a:solidFill>
@@ -7425,7 +7467,7 @@
               </a:rPr>
               <a:t>НЕЙРОННАЯ МОДЕЛЬ · 1/3</a:t>
             </a:r>
-            <a:endParaRPr lang="en-US" sz="1250" dirty="0"/>
+            <a:endParaRPr lang="en-US" sz="1500" dirty="0"/>
           </a:p>
         </p:txBody>
       </p:sp>
@@ -7577,7 +7619,7 @@
                 <a:ea typeface="Calibri" pitchFamily="34" charset="-122"/>
                 <a:cs typeface="Calibri" pitchFamily="34" charset="-120"/>
               </a:rPr>
-              <a:t>Многоклассовая классификация:</a:t>
+              <a:t>Что делает модель:</a:t>
             </a:r>
             <a:endParaRPr lang="en-US" sz="1350" dirty="0"/>
           </a:p>
@@ -7597,7 +7639,7 @@
                 <a:ea typeface="Calibri" pitchFamily="34" charset="-122"/>
                 <a:cs typeface="Calibri" pitchFamily="34" charset="-120"/>
               </a:rPr>
-              <a:t>последовательность событий сессии → один из архетипов</a:t>
+              <a:t>по действиям игрока за сессию определяет его тип</a:t>
             </a:r>
             <a:endParaRPr lang="en-US" sz="1350" dirty="0"/>
           </a:p>
@@ -7638,7 +7680,7 @@
                 <a:ea typeface="Calibri" pitchFamily="34" charset="-122"/>
                 <a:cs typeface="Calibri" pitchFamily="34" charset="-120"/>
               </a:rPr>
-              <a:t xml:space="preserve">Признаки: </a:t>
+              <a:t xml:space="preserve">Учитывает: </a:t>
             </a:r>
             <a:pPr indent="0" marL="0">
               <a:lnSpc>
@@ -7655,7 +7697,7 @@
                 <a:ea typeface="Calibri" pitchFamily="34" charset="-122"/>
                 <a:cs typeface="Calibri" pitchFamily="34" charset="-120"/>
               </a:rPr>
-              <a:t>частоты событий, time_sec, deaths, hints_used, score — с весами critical points из профиля игры</a:t>
+              <a:t>как часто происходят события, время в игре, смерти, подсказки, очки</a:t>
             </a:r>
             <a:endParaRPr lang="en-US" sz="1350" dirty="0"/>
           </a:p>
@@ -7696,7 +7738,7 @@
                 <a:ea typeface="Calibri" pitchFamily="34" charset="-122"/>
                 <a:cs typeface="Calibri" pitchFamily="34" charset="-120"/>
               </a:rPr>
-              <a:t xml:space="preserve">Классы: </a:t>
+              <a:t xml:space="preserve">Типы игроков: </a:t>
             </a:r>
             <a:pPr indent="0" marL="0">
               <a:lnSpc>
@@ -7837,7 +7879,7 @@
                 <a:ea typeface="Calibri" pitchFamily="34" charset="-122"/>
                 <a:cs typeface="Calibri" pitchFamily="34" charset="-120"/>
               </a:rPr>
-              <a:t>Правила не масштабируются</a:t>
+              <a:t>Жёсткие правила не годятся</a:t>
             </a:r>
             <a:endParaRPr lang="en-US" sz="1450" dirty="0"/>
           </a:p>
@@ -7879,7 +7921,7 @@
                 <a:ea typeface="Calibri" pitchFamily="34" charset="-122"/>
                 <a:cs typeface="Calibri" pitchFamily="34" charset="-120"/>
               </a:rPr>
-              <a:t>ручные if-else по метрикам быстро становятся неподдерживаемыми при росте числа событий и архетипов</a:t>
+              <a:t>все случаи прописать вручную невозможно — их слишком много</a:t>
             </a:r>
             <a:endParaRPr lang="en-US" sz="1150" dirty="0"/>
           </a:p>
@@ -8003,7 +8045,7 @@
                 <a:ea typeface="Calibri" pitchFamily="34" charset="-122"/>
                 <a:cs typeface="Calibri" pitchFamily="34" charset="-120"/>
               </a:rPr>
-              <a:t>Модель ловит динамику</a:t>
+              <a:t>Модель видит поведение целиком</a:t>
             </a:r>
             <a:endParaRPr lang="en-US" sz="1450" dirty="0"/>
           </a:p>
@@ -8045,7 +8087,7 @@
                 <a:ea typeface="Calibri" pitchFamily="34" charset="-122"/>
                 <a:cs typeface="Calibri" pitchFamily="34" charset="-120"/>
               </a:rPr>
-              <a:t>архетип определяется порядком и сочетанием действий, а не одним порогом</a:t>
+              <a:t>учитывает порядок и сочетание действий, а не один признак</a:t>
             </a:r>
             <a:endParaRPr lang="en-US" sz="1150" dirty="0"/>
           </a:p>
@@ -8169,7 +8211,7 @@
                 <a:ea typeface="Calibri" pitchFamily="34" charset="-122"/>
                 <a:cs typeface="Calibri" pitchFamily="34" charset="-120"/>
               </a:rPr>
-              <a:t>Дообучение на данных</a:t>
+              <a:t>Учится на данных</a:t>
             </a:r>
             <a:endParaRPr lang="en-US" sz="1450" dirty="0"/>
           </a:p>
@@ -8211,7 +8253,7 @@
                 <a:ea typeface="Calibri" pitchFamily="34" charset="-122"/>
                 <a:cs typeface="Calibri" pitchFamily="34" charset="-120"/>
               </a:rPr>
-              <a:t>модель улучшается по мере накопления реальной телеметрии в Postgres</a:t>
+              <a:t>становится точнее по мере накопления реальной статистики</a:t>
             </a:r>
             <a:endParaRPr lang="en-US" sz="1150" dirty="0"/>
           </a:p>
@@ -8313,7 +8355,7 @@
               <a:buNone/>
             </a:pPr>
             <a:r>
-              <a:rPr lang="en-US" sz="1250" b="1" spc="250" kern="0" dirty="0">
+              <a:rPr lang="en-US" sz="1500" b="1" spc="250" kern="0" dirty="0">
                 <a:solidFill>
                   <a:srgbClr val="1F9BD8"/>
                 </a:solidFill>
@@ -8323,7 +8365,7 @@
               </a:rPr>
               <a:t>НЕЙРОННАЯ МОДЕЛЬ · 2/3</a:t>
             </a:r>
-            <a:endParaRPr lang="en-US" sz="1250" dirty="0"/>
+            <a:endParaRPr lang="en-US" sz="1500" dirty="0"/>
           </a:p>
         </p:txBody>
       </p:sp>
@@ -9836,7 +9878,7 @@
               <a:buNone/>
             </a:pPr>
             <a:r>
-              <a:rPr lang="ru-RU" sz="1250" b="1" kern="0" dirty="0">
+              <a:rPr lang="ru-RU" sz="1500" b="1" kern="0" dirty="0">
                 <a:solidFill>
                   <a:srgbClr val="1F9BD8"/>
                 </a:solidFill>
@@ -11295,7 +11337,7 @@
               <a:buNone/>
             </a:pPr>
             <a:r>
-              <a:rPr lang="en-US" sz="1250" b="1" spc="250" kern="0" dirty="0">
+              <a:rPr lang="en-US" sz="1500" b="1" spc="250" kern="0" dirty="0">
                 <a:solidFill>
                   <a:srgbClr val="1F9BD8"/>
                 </a:solidFill>
@@ -11305,7 +11347,7 @@
               </a:rPr>
               <a:t>АРХИТЕКТУРА МОДЕЛИ</a:t>
             </a:r>
-            <a:endParaRPr lang="en-US" sz="1250" dirty="0"/>
+            <a:endParaRPr lang="en-US" sz="1500" dirty="0"/>
           </a:p>
         </p:txBody>
       </p:sp>
@@ -12344,7 +12386,7 @@
               <a:buNone/>
             </a:pPr>
             <a:r>
-              <a:rPr lang="en-US" sz="1250" b="1" spc="250" kern="0" dirty="0">
+              <a:rPr lang="en-US" sz="1500" b="1" spc="250" kern="0" dirty="0">
                 <a:solidFill>
                   <a:srgbClr val="1F9BD8"/>
                 </a:solidFill>
@@ -12354,7 +12396,7 @@
               </a:rPr>
               <a:t>ИНТЕГРАЦИЯ</a:t>
             </a:r>
-            <a:endParaRPr lang="en-US" sz="1250" dirty="0"/>
+            <a:endParaRPr lang="en-US" sz="1500" dirty="0"/>
           </a:p>
         </p:txBody>
       </p:sp>
@@ -13315,7 +13357,7 @@
               <a:buNone/>
             </a:pPr>
             <a:r>
-              <a:rPr lang="en-US" sz="1250" b="1" spc="250" kern="0" dirty="0">
+              <a:rPr lang="en-US" sz="1500" b="1" spc="250" kern="0" dirty="0">
                 <a:solidFill>
                   <a:srgbClr val="1F9BD8"/>
                 </a:solidFill>
@@ -13325,7 +13367,7 @@
               </a:rPr>
               <a:t>ЗАДЕЛЫ НА БУДУЩЕЕ</a:t>
             </a:r>
-            <a:endParaRPr lang="en-US" sz="1250" dirty="0"/>
+            <a:endParaRPr lang="en-US" sz="1500" dirty="0"/>
           </a:p>
         </p:txBody>
       </p:sp>
